--- a/public/fun/pack/pptx/weddingpro/결혼식프리미엄_40_감사·답례중심_모노블랙.pptx
+++ b/public/fun/pack/pptx/weddingpro/결혼식프리미엄_40_감사·답례중심_모노블랙.pptx
@@ -113,12 +113,12 @@
   <p:extLst>
     <p:ext uri="{521415D9-36F7-43E2-AB2F-B90AF26B5E84}">
       <p14:sectionLst xmlns:p14="http://schemas.microsoft.com/office/powerpoint/2010/main">
-        <p14:section name="시작" id="{8DE8CD9E-2AB1-4371-9529-4C93A8F453D8}">
+        <p14:section name="시작" id="{3EC5C726-D610-412D-9047-EE28B93D2A5B}">
           <p14:sldIdLst>
             <p14:sldId id="256"/>
           </p14:sldIdLst>
         </p14:section>
-        <p14:section name="본문" id="{7E7AB214-FC76-4A2B-B2DE-4D6E0EB98F9D}">
+        <p14:section name="본문" id="{1CD6B88A-1824-4832-B71F-0CC3ABC526BC}">
           <p14:sldIdLst>
             <p14:sldId id="257"/>
             <p14:sldId id="258"/>
@@ -127,7 +127,7 @@
             <p14:sldId id="261"/>
           </p14:sldIdLst>
         </p14:section>
-        <p14:section name="마무리" id="{B10388EB-07AF-4F4D-88B3-EE344DAAED33}">
+        <p14:section name="마무리" id="{9718FEC2-4759-4B1F-9D23-800D4D5F66CE}">
           <p14:sldIdLst>
             <p14:sldId id="262"/>
           </p14:sldIdLst>
@@ -1527,7 +1527,7 @@
             </a:lvl1pPr>
           </a:lstStyle>
           <a:p>
-            <a:fld id="{94FE0742-417C-4DE5-971D-F0FB0E575743}" type="slidenum">
+            <a:fld id="{621A5805-18F2-4A7D-8DE6-A81BEBCF2950}" type="slidenum">
               <a:rPr lang="en-US"/>
               <a:t>‹#›</a:t>
             </a:fld>
@@ -2122,7 +2122,7 @@
             </a:lvl1pPr>
           </a:lstStyle>
           <a:p>
-            <a:fld id="{99BB983C-42B5-4C46-8F35-92E9B136DE86}" type="slidenum">
+            <a:fld id="{4FCB3466-6E2A-4D43-B0D5-740DCD76F6C4}" type="slidenum">
               <a:rPr lang="en-US"/>
               <a:t>‹#›</a:t>
             </a:fld>
@@ -2711,7 +2711,7 @@
             </a:lvl1pPr>
           </a:lstStyle>
           <a:p>
-            <a:fld id="{3C4A4C69-830B-4D56-BFB1-3164F19EC490}" type="slidenum">
+            <a:fld id="{DED9A4BE-878C-4DB0-B35C-77DF0FB4F28C}" type="slidenum">
               <a:rPr lang="en-US"/>
               <a:t>‹#›</a:t>
             </a:fld>
@@ -3520,7 +3520,7 @@
           <a:p>
             <a:r>
               <a:rPr lang="ko-KR"/>
-              <a:t>0000. 00. 00 · 예식장 이름</a:t>
+              <a:t>날짜 입력 · 예식장 이름</a:t>
             </a:r>
           </a:p>
         </p:txBody>
@@ -3755,7 +3755,7 @@
           <a:bodyPr/>
           <a:lstStyle/>
           <a:p>
-            <a:fld id="{34D0E148-DC5B-4949-9BF0-17B12BD7F202}" type="slidenum">
+            <a:fld id="{100F3E1B-8C2D-4DAE-A5D1-7832420650F6}" type="slidenum">
               <a:rPr lang="en-US"/>
               <a:t>‹#›</a:t>
             </a:fld>
@@ -4157,7 +4157,7 @@
           <a:bodyPr/>
           <a:lstStyle/>
           <a:p>
-            <a:fld id="{69D25DD5-CAFB-4518-B426-568CB6EB1110}" type="slidenum">
+            <a:fld id="{DBF5C039-8257-437E-B6C0-CF65533E6525}" type="slidenum">
               <a:rPr lang="en-US"/>
               <a:t>‹#›</a:t>
             </a:fld>
@@ -4499,7 +4499,7 @@
           <a:bodyPr/>
           <a:lstStyle/>
           <a:p>
-            <a:fld id="{4121F26E-B411-404E-92DC-9E772D5D06BB}" type="slidenum">
+            <a:fld id="{C33C4F33-A6E2-46CA-817E-166F211E580F}" type="slidenum">
               <a:rPr lang="en-US"/>
               <a:t>‹#›</a:t>
             </a:fld>
@@ -5748,7 +5748,7 @@
           <a:bodyPr/>
           <a:lstStyle/>
           <a:p>
-            <a:fld id="{418AC006-6E89-4888-BCED-EF3970CFB6AC}" type="slidenum">
+            <a:fld id="{9D336ED6-6C47-4BF1-87D2-A5C1FA430814}" type="slidenum">
               <a:rPr lang="en-US"/>
               <a:t>‹#›</a:t>
             </a:fld>
@@ -5836,7 +5836,7 @@
           <a:bodyPr/>
           <a:lstStyle/>
           <a:p>
-            <a:fld id="{B9D3F0F8-3E17-41A0-B471-2AF0F96F9090}" type="slidenum">
+            <a:fld id="{FEB12A0F-D31B-4C42-846E-62D864910962}" type="slidenum">
               <a:rPr lang="en-US"/>
               <a:t>‹#›</a:t>
             </a:fld>
